--- a/Training Materials/16. React Testing/Slides/4. Testing Component Rendering/testing-component-rendering-slides.pptx
+++ b/Training Materials/16. React Testing/Slides/4. Testing Component Rendering/testing-component-rendering-slides.pptx
@@ -137,7 +137,7 @@
           <a:p>
             <a:fld id="{21106036-7504-4504-B82A-A245F44EFD9E}" type="datetimeFigureOut">
               <a:rPr lang="en-IN" smtClean="0"/>
-              <a:t>27-12-2024</a:t>
+              <a:t>27-09-2025</a:t>
             </a:fld>
             <a:endParaRPr lang="en-IN"/>
           </a:p>
@@ -564,7 +564,7 @@
           <a:p>
             <a:fld id="{8BD4407B-3482-4E60-9799-AEF4F355357A}" type="datetime1">
               <a:rPr lang="en-US" smtClean="0"/>
-              <a:t>12/27/2024</a:t>
+              <a:t>9/27/2025</a:t>
             </a:fld>
             <a:endParaRPr lang="en-US"/>
           </a:p>
@@ -749,7 +749,7 @@
           <a:p>
             <a:fld id="{EC66170D-A06D-4483-90EE-DCCBD71FA1CD}" type="datetime1">
               <a:rPr lang="en-US" smtClean="0"/>
-              <a:t>12/27/2024</a:t>
+              <a:t>9/27/2025</a:t>
             </a:fld>
             <a:endParaRPr lang="en-US"/>
           </a:p>
@@ -1461,7 +1461,7 @@
           <a:p>
             <a:fld id="{3F97A746-BE1B-492B-BAF2-F14F54E010F5}" type="datetime1">
               <a:rPr lang="en-US" smtClean="0"/>
-              <a:t>12/27/2024</a:t>
+              <a:t>9/27/2025</a:t>
             </a:fld>
             <a:endParaRPr lang="en-US"/>
           </a:p>
@@ -1609,7 +1609,7 @@
           <a:p>
             <a:fld id="{61798CAE-05A4-4ECE-BF95-6AD61BAF05BF}" type="datetime1">
               <a:rPr lang="en-US" smtClean="0"/>
-              <a:t>12/27/2024</a:t>
+              <a:t>9/27/2025</a:t>
             </a:fld>
             <a:endParaRPr lang="en-US"/>
           </a:p>
@@ -1728,7 +1728,7 @@
           <a:p>
             <a:fld id="{13143383-64B6-4C05-9BEE-24BC82767CF6}" type="datetime1">
               <a:rPr lang="en-US" smtClean="0"/>
-              <a:t>12/27/2024</a:t>
+              <a:t>9/27/2025</a:t>
             </a:fld>
             <a:endParaRPr lang="en-US"/>
           </a:p>
@@ -1953,7 +1953,7 @@
           <a:p>
             <a:fld id="{3405CEA3-8E46-4B4D-B343-5CC98BA6163D}" type="datetime1">
               <a:rPr lang="en-US" smtClean="0"/>
-              <a:t>12/27/2024</a:t>
+              <a:t>9/27/2025</a:t>
             </a:fld>
             <a:endParaRPr lang="en-US"/>
           </a:p>
@@ -3840,7 +3840,7 @@
               </a:rPr>
               <a:t>'@/pages/index'</a:t>
             </a:r>
-            <a:endParaRPr sz="2600">
+            <a:endParaRPr sz="2600" dirty="0">
               <a:latin typeface="Consolas"/>
               <a:cs typeface="Consolas"/>
             </a:endParaRPr>
@@ -3854,7 +3854,7 @@
                 <a:spcPts val="434"/>
               </a:spcBef>
             </a:pPr>
-            <a:endParaRPr sz="2600">
+            <a:endParaRPr sz="2600" dirty="0">
               <a:latin typeface="Consolas"/>
               <a:cs typeface="Consolas"/>
             </a:endParaRPr>
@@ -4085,7 +4085,7 @@
               </a:rPr>
               <a:t>);</a:t>
             </a:r>
-            <a:endParaRPr sz="2600">
+            <a:endParaRPr sz="2600" dirty="0">
               <a:latin typeface="Consolas"/>
               <a:cs typeface="Consolas"/>
             </a:endParaRPr>
@@ -4309,7 +4309,7 @@
               </a:rPr>
               <a:t>{</a:t>
             </a:r>
-            <a:endParaRPr sz="2600">
+            <a:endParaRPr sz="2600" dirty="0">
               <a:latin typeface="Consolas"/>
               <a:cs typeface="Consolas"/>
             </a:endParaRPr>
@@ -4373,7 +4373,7 @@
               </a:rPr>
               <a:t>List"</a:t>
             </a:r>
-            <a:endParaRPr sz="2600">
+            <a:endParaRPr sz="2600" dirty="0">
               <a:latin typeface="Consolas"/>
               <a:cs typeface="Consolas"/>
             </a:endParaRPr>
@@ -4397,7 +4397,7 @@
               </a:rPr>
               <a:t>});</a:t>
             </a:r>
-            <a:endParaRPr sz="2600">
+            <a:endParaRPr sz="2600" dirty="0">
               <a:latin typeface="Consolas"/>
               <a:cs typeface="Consolas"/>
             </a:endParaRPr>
@@ -4421,7 +4421,7 @@
               </a:rPr>
               <a:t>});</a:t>
             </a:r>
-            <a:endParaRPr sz="2600">
+            <a:endParaRPr sz="2600" dirty="0">
               <a:latin typeface="Consolas"/>
               <a:cs typeface="Consolas"/>
             </a:endParaRPr>
@@ -4588,7 +4588,7 @@
         </p:nvSpPr>
         <p:spPr>
           <a:xfrm>
-            <a:off x="1305881" y="5934455"/>
+            <a:off x="1305881" y="5829300"/>
             <a:ext cx="6993890" cy="482600"/>
           </a:xfrm>
           <a:custGeom>
@@ -4688,8 +4688,8 @@
         </p:nvSpPr>
         <p:spPr>
           <a:xfrm>
-            <a:off x="1305881" y="6813782"/>
-            <a:ext cx="6993890" cy="1360170"/>
+            <a:off x="1305881" y="6667499"/>
+            <a:ext cx="6993890" cy="1454403"/>
           </a:xfrm>
           <a:custGeom>
             <a:avLst/>
